--- a/Day08-JavaScript-and-Async-JavaScript/Day08_Deck_JavaScript_and_Async_JavaScript.pptx
+++ b/Day08-JavaScript-and-Async-JavaScript/Day08_Deck_JavaScript_and_Async_JavaScript.pptx
@@ -3740,13 +3740,13 @@
           <a:noFill/>
         </p:spPr>
         <p:txBody>
-          <a:bodyPr wrap="square" lIns="0" rIns="0" tIns="0" bIns="0" anchor="t">
-            <a:spAutoFit/>
-          </a:bodyPr>
-          <a:lstStyle/>
-          <a:p>
-            <a:r>
-              <a:rPr sz="1133" b="0" i="0">
+          <a:bodyPr wrap="none" lIns="0" rIns="0" tIns="0" bIns="0" anchor="t">
+            <a:spAutoFit/>
+          </a:bodyPr>
+          <a:lstStyle/>
+          <a:p>
+            <a:r>
+              <a:rPr sz="997" b="0" i="0">
                 <a:solidFill>
                   <a:srgbClr val="EAF7F5"/>
                 </a:solidFill>
@@ -3757,7 +3757,7 @@
           </a:p>
           <a:p>
             <a:r>
-              <a:rPr sz="1133" b="0" i="0">
+              <a:rPr sz="997" b="0" i="0">
                 <a:solidFill>
                   <a:srgbClr val="EAF7F5"/>
                 </a:solidFill>
@@ -3768,7 +3768,7 @@
           </a:p>
           <a:p>
             <a:r>
-              <a:rPr sz="1133" b="0" i="0">
+              <a:rPr sz="997" b="0" i="0">
                 <a:solidFill>
                   <a:srgbClr val="EAF7F5"/>
                 </a:solidFill>
@@ -3779,7 +3779,7 @@
           </a:p>
           <a:p>
             <a:r>
-              <a:rPr sz="1133" b="0" i="0">
+              <a:rPr sz="997" b="0" i="0">
                 <a:solidFill>
                   <a:srgbClr val="EAF7F5"/>
                 </a:solidFill>
@@ -3790,7 +3790,7 @@
           </a:p>
           <a:p>
             <a:r>
-              <a:rPr sz="1133" b="0" i="0">
+              <a:rPr sz="997" b="0" i="0">
                 <a:solidFill>
                   <a:srgbClr val="EAF7F5"/>
                 </a:solidFill>
@@ -3801,7 +3801,7 @@
           </a:p>
           <a:p>
             <a:r>
-              <a:rPr sz="1133" b="0" i="0">
+              <a:rPr sz="997" b="0" i="0">
                 <a:solidFill>
                   <a:srgbClr val="EAF7F5"/>
                 </a:solidFill>
@@ -3812,7 +3812,7 @@
           </a:p>
           <a:p>
             <a:r>
-              <a:rPr sz="1133" b="0" i="0">
+              <a:rPr sz="997" b="0" i="0">
                 <a:solidFill>
                   <a:srgbClr val="EAF7F5"/>
                 </a:solidFill>
@@ -3823,7 +3823,7 @@
           </a:p>
           <a:p>
             <a:r>
-              <a:rPr sz="1133" b="0" i="0">
+              <a:rPr sz="997" b="0" i="0">
                 <a:solidFill>
                   <a:srgbClr val="EAF7F5"/>
                 </a:solidFill>
@@ -3834,7 +3834,7 @@
           </a:p>
           <a:p>
             <a:r>
-              <a:rPr sz="1133" b="0" i="0">
+              <a:rPr sz="997" b="0" i="0">
                 <a:solidFill>
                   <a:srgbClr val="EAF7F5"/>
                 </a:solidFill>
@@ -3845,7 +3845,7 @@
           </a:p>
           <a:p>
             <a:r>
-              <a:rPr sz="1133" b="0" i="0">
+              <a:rPr sz="997" b="0" i="0">
                 <a:solidFill>
                   <a:srgbClr val="EAF7F5"/>
                 </a:solidFill>
@@ -3856,7 +3856,7 @@
           </a:p>
           <a:p>
             <a:r>
-              <a:rPr sz="1133" b="0" i="0">
+              <a:rPr sz="997" b="0" i="0">
                 <a:solidFill>
                   <a:srgbClr val="EAF7F5"/>
                 </a:solidFill>
@@ -4734,13 +4734,13 @@
           <a:noFill/>
         </p:spPr>
         <p:txBody>
-          <a:bodyPr wrap="square" lIns="0" rIns="0" tIns="0" bIns="0" anchor="t">
-            <a:spAutoFit/>
-          </a:bodyPr>
-          <a:lstStyle/>
-          <a:p>
-            <a:r>
-              <a:rPr sz="1108" b="0" i="0">
+          <a:bodyPr wrap="none" lIns="0" rIns="0" tIns="0" bIns="0" anchor="t">
+            <a:spAutoFit/>
+          </a:bodyPr>
+          <a:lstStyle/>
+          <a:p>
+            <a:r>
+              <a:rPr sz="975" b="0" i="0">
                 <a:solidFill>
                   <a:srgbClr val="EAF7F5"/>
                 </a:solidFill>
@@ -4751,7 +4751,7 @@
           </a:p>
           <a:p>
             <a:r>
-              <a:rPr sz="1108" b="0" i="0">
+              <a:rPr sz="975" b="0" i="0">
                 <a:solidFill>
                   <a:srgbClr val="EAF7F5"/>
                 </a:solidFill>
@@ -4762,7 +4762,7 @@
           </a:p>
           <a:p>
             <a:r>
-              <a:rPr sz="1108" b="0" i="0">
+              <a:rPr sz="975" b="0" i="0">
                 <a:solidFill>
                   <a:srgbClr val="EAF7F5"/>
                 </a:solidFill>
@@ -4773,7 +4773,7 @@
           </a:p>
           <a:p>
             <a:r>
-              <a:rPr sz="1108" b="0" i="0">
+              <a:rPr sz="975" b="0" i="0">
                 <a:solidFill>
                   <a:srgbClr val="EAF7F5"/>
                 </a:solidFill>
@@ -4784,7 +4784,7 @@
           </a:p>
           <a:p>
             <a:r>
-              <a:rPr sz="1108" b="0" i="0">
+              <a:rPr sz="975" b="0" i="0">
                 <a:solidFill>
                   <a:srgbClr val="EAF7F5"/>
                 </a:solidFill>
@@ -4795,7 +4795,7 @@
           </a:p>
           <a:p>
             <a:r>
-              <a:rPr sz="1108" b="0" i="0">
+              <a:rPr sz="975" b="0" i="0">
                 <a:solidFill>
                   <a:srgbClr val="EAF7F5"/>
                 </a:solidFill>
@@ -4806,7 +4806,7 @@
           </a:p>
           <a:p>
             <a:r>
-              <a:rPr sz="1108" b="0" i="0">
+              <a:rPr sz="975" b="0" i="0">
                 <a:solidFill>
                   <a:srgbClr val="EAF7F5"/>
                 </a:solidFill>
@@ -4817,7 +4817,7 @@
           </a:p>
           <a:p>
             <a:r>
-              <a:rPr sz="1108" b="0" i="0">
+              <a:rPr sz="975" b="0" i="0">
                 <a:solidFill>
                   <a:srgbClr val="EAF7F5"/>
                 </a:solidFill>
@@ -4828,7 +4828,7 @@
           </a:p>
           <a:p>
             <a:r>
-              <a:rPr sz="1108" b="0" i="0">
+              <a:rPr sz="975" b="0" i="0">
                 <a:solidFill>
                   <a:srgbClr val="EAF7F5"/>
                 </a:solidFill>
@@ -4839,7 +4839,7 @@
           </a:p>
           <a:p>
             <a:r>
-              <a:rPr sz="1108" b="0" i="0">
+              <a:rPr sz="975" b="0" i="0">
                 <a:solidFill>
                   <a:srgbClr val="EAF7F5"/>
                 </a:solidFill>
@@ -4850,7 +4850,7 @@
           </a:p>
           <a:p>
             <a:r>
-              <a:rPr sz="1108" b="0" i="0">
+              <a:rPr sz="975" b="0" i="0">
                 <a:solidFill>
                   <a:srgbClr val="EAF7F5"/>
                 </a:solidFill>
@@ -5875,13 +5875,13 @@
           <a:noFill/>
         </p:spPr>
         <p:txBody>
-          <a:bodyPr wrap="square" lIns="0" rIns="0" tIns="0" bIns="0" anchor="t">
-            <a:spAutoFit/>
-          </a:bodyPr>
-          <a:lstStyle/>
-          <a:p>
-            <a:r>
-              <a:rPr sz="879" b="0" i="0">
+          <a:bodyPr wrap="none" lIns="0" rIns="0" tIns="0" bIns="0" anchor="t">
+            <a:spAutoFit/>
+          </a:bodyPr>
+          <a:lstStyle/>
+          <a:p>
+            <a:r>
+              <a:rPr sz="773" b="0" i="0">
                 <a:solidFill>
                   <a:srgbClr val="EAF7F5"/>
                 </a:solidFill>
@@ -5892,7 +5892,7 @@
           </a:p>
           <a:p>
             <a:r>
-              <a:rPr sz="879" b="0" i="0">
+              <a:rPr sz="773" b="0" i="0">
                 <a:solidFill>
                   <a:srgbClr val="EAF7F5"/>
                 </a:solidFill>
@@ -5903,7 +5903,7 @@
           </a:p>
           <a:p>
             <a:r>
-              <a:rPr sz="879" b="0" i="0">
+              <a:rPr sz="773" b="0" i="0">
                 <a:solidFill>
                   <a:srgbClr val="EAF7F5"/>
                 </a:solidFill>
@@ -5914,7 +5914,7 @@
           </a:p>
           <a:p>
             <a:r>
-              <a:rPr sz="879" b="0" i="0">
+              <a:rPr sz="773" b="0" i="0">
                 <a:solidFill>
                   <a:srgbClr val="EAF7F5"/>
                 </a:solidFill>
@@ -5925,7 +5925,7 @@
           </a:p>
           <a:p>
             <a:r>
-              <a:rPr sz="879" b="0" i="0">
+              <a:rPr sz="773" b="0" i="0">
                 <a:solidFill>
                   <a:srgbClr val="EAF7F5"/>
                 </a:solidFill>
@@ -5936,7 +5936,7 @@
           </a:p>
           <a:p>
             <a:r>
-              <a:rPr sz="879" b="0" i="0">
+              <a:rPr sz="773" b="0" i="0">
                 <a:solidFill>
                   <a:srgbClr val="EAF7F5"/>
                 </a:solidFill>
@@ -5947,7 +5947,7 @@
           </a:p>
           <a:p>
             <a:r>
-              <a:rPr sz="879" b="0" i="0">
+              <a:rPr sz="773" b="0" i="0">
                 <a:solidFill>
                   <a:srgbClr val="EAF7F5"/>
                 </a:solidFill>
@@ -5958,7 +5958,7 @@
           </a:p>
           <a:p>
             <a:r>
-              <a:rPr sz="879" b="0" i="0">
+              <a:rPr sz="773" b="0" i="0">
                 <a:solidFill>
                   <a:srgbClr val="EAF7F5"/>
                 </a:solidFill>
@@ -5969,7 +5969,7 @@
           </a:p>
           <a:p>
             <a:r>
-              <a:rPr sz="879" b="0" i="0">
+              <a:rPr sz="773" b="0" i="0">
                 <a:solidFill>
                   <a:srgbClr val="EAF7F5"/>
                 </a:solidFill>
@@ -5980,7 +5980,7 @@
           </a:p>
           <a:p>
             <a:r>
-              <a:rPr sz="879" b="0" i="0">
+              <a:rPr sz="773" b="0" i="0">
                 <a:solidFill>
                   <a:srgbClr val="EAF7F5"/>
                 </a:solidFill>
@@ -5991,7 +5991,7 @@
           </a:p>
           <a:p>
             <a:r>
-              <a:rPr sz="879" b="0" i="0">
+              <a:rPr sz="773" b="0" i="0">
                 <a:solidFill>
                   <a:srgbClr val="EAF7F5"/>
                 </a:solidFill>
@@ -6002,7 +6002,7 @@
           </a:p>
           <a:p>
             <a:r>
-              <a:rPr sz="879" b="0" i="0">
+              <a:rPr sz="773" b="0" i="0">
                 <a:solidFill>
                   <a:srgbClr val="EAF7F5"/>
                 </a:solidFill>
@@ -6203,7 +6203,7 @@
           <a:noFill/>
         </p:spPr>
         <p:txBody>
-          <a:bodyPr wrap="square" lIns="0" rIns="0" tIns="0" bIns="0" anchor="t">
+          <a:bodyPr wrap="none" lIns="0" rIns="0" tIns="0" bIns="0" anchor="t">
             <a:spAutoFit/>
           </a:bodyPr>
           <a:lstStyle/>
@@ -9597,13 +9597,13 @@
           <a:noFill/>
         </p:spPr>
         <p:txBody>
-          <a:bodyPr wrap="square" lIns="0" rIns="0" tIns="0" bIns="0" anchor="t">
-            <a:spAutoFit/>
-          </a:bodyPr>
-          <a:lstStyle/>
-          <a:p>
-            <a:r>
-              <a:rPr sz="1400" b="0" i="0">
+          <a:bodyPr wrap="none" lIns="0" rIns="0" tIns="0" bIns="0" anchor="t">
+            <a:spAutoFit/>
+          </a:bodyPr>
+          <a:lstStyle/>
+          <a:p>
+            <a:r>
+              <a:rPr sz="1360" b="0" i="0">
                 <a:solidFill>
                   <a:srgbClr val="EAF7F5"/>
                 </a:solidFill>
@@ -9614,7 +9614,7 @@
           </a:p>
           <a:p>
             <a:r>
-              <a:rPr sz="1400" b="0" i="0">
+              <a:rPr sz="1360" b="0" i="0">
                 <a:solidFill>
                   <a:srgbClr val="EAF7F5"/>
                 </a:solidFill>
@@ -9625,7 +9625,7 @@
           </a:p>
           <a:p>
             <a:r>
-              <a:rPr sz="1400" b="0" i="0">
+              <a:rPr sz="1360" b="0" i="0">
                 <a:solidFill>
                   <a:srgbClr val="EAF7F5"/>
                 </a:solidFill>
@@ -9636,7 +9636,7 @@
           </a:p>
           <a:p>
             <a:r>
-              <a:rPr sz="1400" b="0" i="0">
+              <a:rPr sz="1360" b="0" i="0">
                 <a:solidFill>
                   <a:srgbClr val="EAF7F5"/>
                 </a:solidFill>
@@ -9647,7 +9647,7 @@
           </a:p>
           <a:p>
             <a:r>
-              <a:rPr sz="1400" b="0" i="0">
+              <a:rPr sz="1360" b="0" i="0">
                 <a:solidFill>
                   <a:srgbClr val="EAF7F5"/>
                 </a:solidFill>
@@ -9658,7 +9658,7 @@
           </a:p>
           <a:p>
             <a:r>
-              <a:rPr sz="1400" b="0" i="0">
+              <a:rPr sz="1360" b="0" i="0">
                 <a:solidFill>
                   <a:srgbClr val="EAF7F5"/>
                 </a:solidFill>
@@ -9669,7 +9669,7 @@
           </a:p>
           <a:p>
             <a:r>
-              <a:rPr sz="1400" b="0" i="0">
+              <a:rPr sz="1360" b="0" i="0">
                 <a:solidFill>
                   <a:srgbClr val="EAF7F5"/>
                 </a:solidFill>
@@ -9680,7 +9680,7 @@
           </a:p>
           <a:p>
             <a:r>
-              <a:rPr sz="1400" b="0" i="0">
+              <a:rPr sz="1360" b="0" i="0">
                 <a:solidFill>
                   <a:srgbClr val="EAF7F5"/>
                 </a:solidFill>
@@ -9691,7 +9691,7 @@
           </a:p>
           <a:p>
             <a:r>
-              <a:rPr sz="1400" b="0" i="0">
+              <a:rPr sz="1360" b="0" i="0">
                 <a:solidFill>
                   <a:srgbClr val="EAF7F5"/>
                 </a:solidFill>
@@ -9702,7 +9702,7 @@
           </a:p>
           <a:p>
             <a:r>
-              <a:rPr sz="1400" b="0" i="0">
+              <a:rPr sz="1360" b="0" i="0">
                 <a:solidFill>
                   <a:srgbClr val="EAF7F5"/>
                 </a:solidFill>
@@ -9713,7 +9713,7 @@
           </a:p>
           <a:p>
             <a:r>
-              <a:rPr sz="1400" b="0" i="0">
+              <a:rPr sz="1360" b="0" i="0">
                 <a:solidFill>
                   <a:srgbClr val="EAF7F5"/>
                 </a:solidFill>
@@ -9724,7 +9724,7 @@
           </a:p>
           <a:p>
             <a:r>
-              <a:rPr sz="1400" b="0" i="0">
+              <a:rPr sz="1360" b="0" i="0">
                 <a:solidFill>
                   <a:srgbClr val="EAF7F5"/>
                 </a:solidFill>
@@ -10474,13 +10474,13 @@
           <a:noFill/>
         </p:spPr>
         <p:txBody>
-          <a:bodyPr wrap="square" lIns="0" rIns="0" tIns="0" bIns="0" anchor="t">
-            <a:spAutoFit/>
-          </a:bodyPr>
-          <a:lstStyle/>
-          <a:p>
-            <a:r>
-              <a:rPr sz="1108" b="0" i="0">
+          <a:bodyPr wrap="none" lIns="0" rIns="0" tIns="0" bIns="0" anchor="t">
+            <a:spAutoFit/>
+          </a:bodyPr>
+          <a:lstStyle/>
+          <a:p>
+            <a:r>
+              <a:rPr sz="975" b="0" i="0">
                 <a:solidFill>
                   <a:srgbClr val="EAF7F5"/>
                 </a:solidFill>
@@ -10491,7 +10491,7 @@
           </a:p>
           <a:p>
             <a:r>
-              <a:rPr sz="1108" b="0" i="0">
+              <a:rPr sz="975" b="0" i="0">
                 <a:solidFill>
                   <a:srgbClr val="EAF7F5"/>
                 </a:solidFill>
@@ -10502,7 +10502,7 @@
           </a:p>
           <a:p>
             <a:r>
-              <a:rPr sz="1108" b="0" i="0">
+              <a:rPr sz="975" b="0" i="0">
                 <a:solidFill>
                   <a:srgbClr val="EAF7F5"/>
                 </a:solidFill>
@@ -10513,7 +10513,7 @@
           </a:p>
           <a:p>
             <a:r>
-              <a:rPr sz="1108" b="0" i="0">
+              <a:rPr sz="975" b="0" i="0">
                 <a:solidFill>
                   <a:srgbClr val="EAF7F5"/>
                 </a:solidFill>
@@ -10524,7 +10524,7 @@
           </a:p>
           <a:p>
             <a:r>
-              <a:rPr sz="1108" b="0" i="0">
+              <a:rPr sz="975" b="0" i="0">
                 <a:solidFill>
                   <a:srgbClr val="EAF7F5"/>
                 </a:solidFill>
@@ -10535,7 +10535,7 @@
           </a:p>
           <a:p>
             <a:r>
-              <a:rPr sz="1108" b="0" i="0">
+              <a:rPr sz="975" b="0" i="0">
                 <a:solidFill>
                   <a:srgbClr val="EAF7F5"/>
                 </a:solidFill>
@@ -10546,7 +10546,7 @@
           </a:p>
           <a:p>
             <a:r>
-              <a:rPr sz="1108" b="0" i="0">
+              <a:rPr sz="975" b="0" i="0">
                 <a:solidFill>
                   <a:srgbClr val="EAF7F5"/>
                 </a:solidFill>
@@ -10557,7 +10557,7 @@
           </a:p>
           <a:p>
             <a:r>
-              <a:rPr sz="1108" b="0" i="0">
+              <a:rPr sz="975" b="0" i="0">
                 <a:solidFill>
                   <a:srgbClr val="EAF7F5"/>
                 </a:solidFill>
@@ -10568,7 +10568,7 @@
           </a:p>
           <a:p>
             <a:r>
-              <a:rPr sz="1108" b="0" i="0">
+              <a:rPr sz="975" b="0" i="0">
                 <a:solidFill>
                   <a:srgbClr val="EAF7F5"/>
                 </a:solidFill>
@@ -10579,7 +10579,7 @@
           </a:p>
           <a:p>
             <a:r>
-              <a:rPr sz="1108" b="0" i="0">
+              <a:rPr sz="975" b="0" i="0">
                 <a:solidFill>
                   <a:srgbClr val="EAF7F5"/>
                 </a:solidFill>
@@ -10590,7 +10590,7 @@
           </a:p>
           <a:p>
             <a:r>
-              <a:rPr sz="1108" b="0" i="0">
+              <a:rPr sz="975" b="0" i="0">
                 <a:solidFill>
                   <a:srgbClr val="EAF7F5"/>
                 </a:solidFill>
@@ -10601,7 +10601,7 @@
           </a:p>
           <a:p>
             <a:r>
-              <a:rPr sz="1108" b="0" i="0">
+              <a:rPr sz="975" b="0" i="0">
                 <a:solidFill>
                   <a:srgbClr val="EAF7F5"/>
                 </a:solidFill>
@@ -10889,13 +10889,13 @@
           <a:noFill/>
         </p:spPr>
         <p:txBody>
-          <a:bodyPr wrap="square" lIns="0" rIns="0" tIns="0" bIns="0" anchor="t">
-            <a:spAutoFit/>
-          </a:bodyPr>
-          <a:lstStyle/>
-          <a:p>
-            <a:r>
-              <a:rPr sz="1243" b="0" i="0">
+          <a:bodyPr wrap="none" lIns="0" rIns="0" tIns="0" bIns="0" anchor="t">
+            <a:spAutoFit/>
+          </a:bodyPr>
+          <a:lstStyle/>
+          <a:p>
+            <a:r>
+              <a:rPr sz="1094" b="0" i="0">
                 <a:solidFill>
                   <a:srgbClr val="EAF7F5"/>
                 </a:solidFill>
@@ -10906,7 +10906,7 @@
           </a:p>
           <a:p>
             <a:r>
-              <a:rPr sz="1243" b="0" i="0">
+              <a:rPr sz="1094" b="0" i="0">
                 <a:solidFill>
                   <a:srgbClr val="EAF7F5"/>
                 </a:solidFill>
@@ -10917,7 +10917,7 @@
           </a:p>
           <a:p>
             <a:r>
-              <a:rPr sz="1243" b="0" i="0">
+              <a:rPr sz="1094" b="0" i="0">
                 <a:solidFill>
                   <a:srgbClr val="EAF7F5"/>
                 </a:solidFill>
@@ -10928,7 +10928,7 @@
           </a:p>
           <a:p>
             <a:r>
-              <a:rPr sz="1243" b="0" i="0">
+              <a:rPr sz="1094" b="0" i="0">
                 <a:solidFill>
                   <a:srgbClr val="EAF7F5"/>
                 </a:solidFill>
@@ -10939,7 +10939,7 @@
           </a:p>
           <a:p>
             <a:r>
-              <a:rPr sz="1243" b="0" i="0">
+              <a:rPr sz="1094" b="0" i="0">
                 <a:solidFill>
                   <a:srgbClr val="EAF7F5"/>
                 </a:solidFill>
@@ -10950,7 +10950,7 @@
           </a:p>
           <a:p>
             <a:r>
-              <a:rPr sz="1243" b="0" i="0">
+              <a:rPr sz="1094" b="0" i="0">
                 <a:solidFill>
                   <a:srgbClr val="EAF7F5"/>
                 </a:solidFill>
@@ -10961,7 +10961,7 @@
           </a:p>
           <a:p>
             <a:r>
-              <a:rPr sz="1243" b="0" i="0">
+              <a:rPr sz="1094" b="0" i="0">
                 <a:solidFill>
                   <a:srgbClr val="EAF7F5"/>
                 </a:solidFill>
@@ -10972,7 +10972,7 @@
           </a:p>
           <a:p>
             <a:r>
-              <a:rPr sz="1243" b="0" i="0">
+              <a:rPr sz="1094" b="0" i="0">
                 <a:solidFill>
                   <a:srgbClr val="EAF7F5"/>
                 </a:solidFill>
@@ -10983,7 +10983,7 @@
           </a:p>
           <a:p>
             <a:r>
-              <a:rPr sz="1243" b="0" i="0">
+              <a:rPr sz="1094" b="0" i="0">
                 <a:solidFill>
                   <a:srgbClr val="EAF7F5"/>
                 </a:solidFill>
@@ -10994,7 +10994,7 @@
           </a:p>
           <a:p>
             <a:r>
-              <a:rPr sz="1243" b="0" i="0">
+              <a:rPr sz="1094" b="0" i="0">
                 <a:solidFill>
                   <a:srgbClr val="EAF7F5"/>
                 </a:solidFill>
@@ -11005,7 +11005,7 @@
           </a:p>
           <a:p>
             <a:r>
-              <a:rPr sz="1243" b="0" i="0">
+              <a:rPr sz="1094" b="0" i="0">
                 <a:solidFill>
                   <a:srgbClr val="EAF7F5"/>
                 </a:solidFill>
@@ -11293,13 +11293,13 @@
           <a:noFill/>
         </p:spPr>
         <p:txBody>
-          <a:bodyPr wrap="square" lIns="0" rIns="0" tIns="0" bIns="0" anchor="t">
-            <a:spAutoFit/>
-          </a:bodyPr>
-          <a:lstStyle/>
-          <a:p>
-            <a:r>
-              <a:rPr sz="1400" b="0" i="0">
+          <a:bodyPr wrap="none" lIns="0" rIns="0" tIns="0" bIns="0" anchor="t">
+            <a:spAutoFit/>
+          </a:bodyPr>
+          <a:lstStyle/>
+          <a:p>
+            <a:r>
+              <a:rPr sz="1320" b="0" i="0">
                 <a:solidFill>
                   <a:srgbClr val="EAF7F5"/>
                 </a:solidFill>
@@ -11310,7 +11310,7 @@
           </a:p>
           <a:p>
             <a:r>
-              <a:rPr sz="1400" b="0" i="0">
+              <a:rPr sz="1320" b="0" i="0">
                 <a:solidFill>
                   <a:srgbClr val="EAF7F5"/>
                 </a:solidFill>
@@ -11321,7 +11321,7 @@
           </a:p>
           <a:p>
             <a:r>
-              <a:rPr sz="1400" b="0" i="0">
+              <a:rPr sz="1320" b="0" i="0">
                 <a:solidFill>
                   <a:srgbClr val="EAF7F5"/>
                 </a:solidFill>
@@ -11332,7 +11332,7 @@
           </a:p>
           <a:p>
             <a:r>
-              <a:rPr sz="1400" b="0" i="0">
+              <a:rPr sz="1320" b="0" i="0">
                 <a:solidFill>
                   <a:srgbClr val="EAF7F5"/>
                 </a:solidFill>
@@ -11343,7 +11343,7 @@
           </a:p>
           <a:p>
             <a:r>
-              <a:rPr sz="1400" b="0" i="0">
+              <a:rPr sz="1320" b="0" i="0">
                 <a:solidFill>
                   <a:srgbClr val="EAF7F5"/>
                 </a:solidFill>
@@ -11354,7 +11354,7 @@
           </a:p>
           <a:p>
             <a:r>
-              <a:rPr sz="1400" b="0" i="0">
+              <a:rPr sz="1320" b="0" i="0">
                 <a:solidFill>
                   <a:srgbClr val="EAF7F5"/>
                 </a:solidFill>
@@ -11365,7 +11365,7 @@
           </a:p>
           <a:p>
             <a:r>
-              <a:rPr sz="1400" b="0" i="0">
+              <a:rPr sz="1320" b="0" i="0">
                 <a:solidFill>
                   <a:srgbClr val="EAF7F5"/>
                 </a:solidFill>
@@ -11376,7 +11376,7 @@
           </a:p>
           <a:p>
             <a:r>
-              <a:rPr sz="1400" b="0" i="0">
+              <a:rPr sz="1320" b="0" i="0">
                 <a:solidFill>
                   <a:srgbClr val="EAF7F5"/>
                 </a:solidFill>
@@ -11387,7 +11387,7 @@
           </a:p>
           <a:p>
             <a:r>
-              <a:rPr sz="1400" b="0" i="0">
+              <a:rPr sz="1320" b="0" i="0">
                 <a:solidFill>
                   <a:srgbClr val="EAF7F5"/>
                 </a:solidFill>
@@ -11398,7 +11398,7 @@
           </a:p>
           <a:p>
             <a:r>
-              <a:rPr sz="1400" b="0" i="0">
+              <a:rPr sz="1320" b="0" i="0">
                 <a:solidFill>
                   <a:srgbClr val="EAF7F5"/>
                 </a:solidFill>
@@ -11686,13 +11686,13 @@
           <a:noFill/>
         </p:spPr>
         <p:txBody>
-          <a:bodyPr wrap="square" lIns="0" rIns="0" tIns="0" bIns="0" anchor="t">
-            <a:spAutoFit/>
-          </a:bodyPr>
-          <a:lstStyle/>
-          <a:p>
-            <a:r>
-              <a:rPr sz="1214" b="0" i="0">
+          <a:bodyPr wrap="none" lIns="0" rIns="0" tIns="0" bIns="0" anchor="t">
+            <a:spAutoFit/>
+          </a:bodyPr>
+          <a:lstStyle/>
+          <a:p>
+            <a:r>
+              <a:rPr sz="1068" b="0" i="0">
                 <a:solidFill>
                   <a:srgbClr val="EAF7F5"/>
                 </a:solidFill>
@@ -11703,7 +11703,7 @@
           </a:p>
           <a:p>
             <a:r>
-              <a:rPr sz="1214" b="0" i="0">
+              <a:rPr sz="1068" b="0" i="0">
                 <a:solidFill>
                   <a:srgbClr val="EAF7F5"/>
                 </a:solidFill>
@@ -11714,7 +11714,7 @@
           </a:p>
           <a:p>
             <a:r>
-              <a:rPr sz="1214" b="0" i="0">
+              <a:rPr sz="1068" b="0" i="0">
                 <a:solidFill>
                   <a:srgbClr val="EAF7F5"/>
                 </a:solidFill>
@@ -11725,7 +11725,7 @@
           </a:p>
           <a:p>
             <a:r>
-              <a:rPr sz="1214" b="0" i="0">
+              <a:rPr sz="1068" b="0" i="0">
                 <a:solidFill>
                   <a:srgbClr val="EAF7F5"/>
                 </a:solidFill>
@@ -11736,7 +11736,7 @@
           </a:p>
           <a:p>
             <a:r>
-              <a:rPr sz="1214" b="0" i="0">
+              <a:rPr sz="1068" b="0" i="0">
                 <a:solidFill>
                   <a:srgbClr val="EAF7F5"/>
                 </a:solidFill>
@@ -11747,7 +11747,7 @@
           </a:p>
           <a:p>
             <a:r>
-              <a:rPr sz="1214" b="0" i="0">
+              <a:rPr sz="1068" b="0" i="0">
                 <a:solidFill>
                   <a:srgbClr val="EAF7F5"/>
                 </a:solidFill>
@@ -11758,7 +11758,7 @@
           </a:p>
           <a:p>
             <a:r>
-              <a:rPr sz="1214" b="0" i="0">
+              <a:rPr sz="1068" b="0" i="0">
                 <a:solidFill>
                   <a:srgbClr val="EAF7F5"/>
                 </a:solidFill>
@@ -11769,7 +11769,7 @@
           </a:p>
           <a:p>
             <a:r>
-              <a:rPr sz="1214" b="0" i="0">
+              <a:rPr sz="1068" b="0" i="0">
                 <a:solidFill>
                   <a:srgbClr val="EAF7F5"/>
                 </a:solidFill>
@@ -11780,7 +11780,7 @@
           </a:p>
           <a:p>
             <a:r>
-              <a:rPr sz="1214" b="0" i="0">
+              <a:rPr sz="1068" b="0" i="0">
                 <a:solidFill>
                   <a:srgbClr val="EAF7F5"/>
                 </a:solidFill>
@@ -12068,13 +12068,13 @@
           <a:noFill/>
         </p:spPr>
         <p:txBody>
-          <a:bodyPr wrap="square" lIns="0" rIns="0" tIns="0" bIns="0" anchor="t">
-            <a:spAutoFit/>
-          </a:bodyPr>
-          <a:lstStyle/>
-          <a:p>
-            <a:r>
-              <a:rPr sz="980" b="0" i="0">
+          <a:bodyPr wrap="none" lIns="0" rIns="0" tIns="0" bIns="0" anchor="t">
+            <a:spAutoFit/>
+          </a:bodyPr>
+          <a:lstStyle/>
+          <a:p>
+            <a:r>
+              <a:rPr sz="863" b="0" i="0">
                 <a:solidFill>
                   <a:srgbClr val="EAF7F5"/>
                 </a:solidFill>
@@ -12085,7 +12085,7 @@
           </a:p>
           <a:p>
             <a:r>
-              <a:rPr sz="980" b="0" i="0">
+              <a:rPr sz="863" b="0" i="0">
                 <a:solidFill>
                   <a:srgbClr val="EAF7F5"/>
                 </a:solidFill>
@@ -12096,7 +12096,7 @@
           </a:p>
           <a:p>
             <a:r>
-              <a:rPr sz="980" b="0" i="0">
+              <a:rPr sz="863" b="0" i="0">
                 <a:solidFill>
                   <a:srgbClr val="EAF7F5"/>
                 </a:solidFill>
@@ -12107,7 +12107,7 @@
           </a:p>
           <a:p>
             <a:r>
-              <a:rPr sz="980" b="0" i="0">
+              <a:rPr sz="863" b="0" i="0">
                 <a:solidFill>
                   <a:srgbClr val="EAF7F5"/>
                 </a:solidFill>
@@ -12118,7 +12118,7 @@
           </a:p>
           <a:p>
             <a:r>
-              <a:rPr sz="980" b="0" i="0">
+              <a:rPr sz="863" b="0" i="0">
                 <a:solidFill>
                   <a:srgbClr val="EAF7F5"/>
                 </a:solidFill>
@@ -12129,7 +12129,7 @@
           </a:p>
           <a:p>
             <a:r>
-              <a:rPr sz="980" b="0" i="0">
+              <a:rPr sz="863" b="0" i="0">
                 <a:solidFill>
                   <a:srgbClr val="EAF7F5"/>
                 </a:solidFill>
@@ -12140,7 +12140,7 @@
           </a:p>
           <a:p>
             <a:r>
-              <a:rPr sz="980" b="0" i="0">
+              <a:rPr sz="863" b="0" i="0">
                 <a:solidFill>
                   <a:srgbClr val="EAF7F5"/>
                 </a:solidFill>
@@ -12151,7 +12151,7 @@
           </a:p>
           <a:p>
             <a:r>
-              <a:rPr sz="980" b="0" i="0">
+              <a:rPr sz="863" b="0" i="0">
                 <a:solidFill>
                   <a:srgbClr val="EAF7F5"/>
                 </a:solidFill>
@@ -12162,7 +12162,7 @@
           </a:p>
           <a:p>
             <a:r>
-              <a:rPr sz="980" b="0" i="0">
+              <a:rPr sz="863" b="0" i="0">
                 <a:solidFill>
                   <a:srgbClr val="EAF7F5"/>
                 </a:solidFill>
@@ -12173,7 +12173,7 @@
           </a:p>
           <a:p>
             <a:r>
-              <a:rPr sz="980" b="0" i="0">
+              <a:rPr sz="863" b="0" i="0">
                 <a:solidFill>
                   <a:srgbClr val="EAF7F5"/>
                 </a:solidFill>
@@ -12184,7 +12184,7 @@
           </a:p>
           <a:p>
             <a:r>
-              <a:rPr sz="980" b="0" i="0">
+              <a:rPr sz="863" b="0" i="0">
                 <a:solidFill>
                   <a:srgbClr val="EAF7F5"/>
                 </a:solidFill>
@@ -12195,7 +12195,7 @@
           </a:p>
           <a:p>
             <a:r>
-              <a:rPr sz="980" b="0" i="0">
+              <a:rPr sz="863" b="0" i="0">
                 <a:solidFill>
                   <a:srgbClr val="EAF7F5"/>
                 </a:solidFill>
@@ -12206,7 +12206,7 @@
           </a:p>
           <a:p>
             <a:r>
-              <a:rPr sz="980" b="0" i="0">
+              <a:rPr sz="863" b="0" i="0">
                 <a:solidFill>
                   <a:srgbClr val="EAF7F5"/>
                 </a:solidFill>
@@ -17678,13 +17678,13 @@
           <a:noFill/>
         </p:spPr>
         <p:txBody>
-          <a:bodyPr wrap="square" lIns="0" rIns="0" tIns="0" bIns="0" anchor="t">
-            <a:spAutoFit/>
-          </a:bodyPr>
-          <a:lstStyle/>
-          <a:p>
-            <a:r>
-              <a:rPr sz="1062" b="0" i="0">
+          <a:bodyPr wrap="none" lIns="0" rIns="0" tIns="0" bIns="0" anchor="t">
+            <a:spAutoFit/>
+          </a:bodyPr>
+          <a:lstStyle/>
+          <a:p>
+            <a:r>
+              <a:rPr sz="935" b="0" i="0">
                 <a:solidFill>
                   <a:srgbClr val="EAF7F5"/>
                 </a:solidFill>
@@ -17695,7 +17695,7 @@
           </a:p>
           <a:p>
             <a:r>
-              <a:rPr sz="1062" b="0" i="0">
+              <a:rPr sz="935" b="0" i="0">
                 <a:solidFill>
                   <a:srgbClr val="EAF7F5"/>
                 </a:solidFill>
@@ -17706,7 +17706,7 @@
           </a:p>
           <a:p>
             <a:r>
-              <a:rPr sz="1062" b="0" i="0">
+              <a:rPr sz="935" b="0" i="0">
                 <a:solidFill>
                   <a:srgbClr val="EAF7F5"/>
                 </a:solidFill>
@@ -17717,7 +17717,7 @@
           </a:p>
           <a:p>
             <a:r>
-              <a:rPr sz="1062" b="0" i="0">
+              <a:rPr sz="935" b="0" i="0">
                 <a:solidFill>
                   <a:srgbClr val="EAF7F5"/>
                 </a:solidFill>
@@ -17728,7 +17728,7 @@
           </a:p>
           <a:p>
             <a:r>
-              <a:rPr sz="1062" b="0" i="0">
+              <a:rPr sz="935" b="0" i="0">
                 <a:solidFill>
                   <a:srgbClr val="EAF7F5"/>
                 </a:solidFill>
@@ -17739,7 +17739,7 @@
           </a:p>
           <a:p>
             <a:r>
-              <a:rPr sz="1062" b="0" i="0">
+              <a:rPr sz="935" b="0" i="0">
                 <a:solidFill>
                   <a:srgbClr val="EAF7F5"/>
                 </a:solidFill>
@@ -17750,7 +17750,7 @@
           </a:p>
           <a:p>
             <a:r>
-              <a:rPr sz="1062" b="0" i="0">
+              <a:rPr sz="935" b="0" i="0">
                 <a:solidFill>
                   <a:srgbClr val="EAF7F5"/>
                 </a:solidFill>
@@ -17761,7 +17761,7 @@
           </a:p>
           <a:p>
             <a:r>
-              <a:rPr sz="1062" b="0" i="0">
+              <a:rPr sz="935" b="0" i="0">
                 <a:solidFill>
                   <a:srgbClr val="EAF7F5"/>
                 </a:solidFill>
@@ -17772,7 +17772,7 @@
           </a:p>
           <a:p>
             <a:r>
-              <a:rPr sz="1062" b="0" i="0">
+              <a:rPr sz="935" b="0" i="0">
                 <a:solidFill>
                   <a:srgbClr val="EAF7F5"/>
                 </a:solidFill>
@@ -17783,7 +17783,7 @@
           </a:p>
           <a:p>
             <a:r>
-              <a:rPr sz="1062" b="0" i="0">
+              <a:rPr sz="935" b="0" i="0">
                 <a:solidFill>
                   <a:srgbClr val="EAF7F5"/>
                 </a:solidFill>
@@ -18703,13 +18703,13 @@
           <a:noFill/>
         </p:spPr>
         <p:txBody>
-          <a:bodyPr wrap="square" lIns="0" rIns="0" tIns="0" bIns="0" anchor="t">
-            <a:spAutoFit/>
-          </a:bodyPr>
-          <a:lstStyle/>
-          <a:p>
-            <a:r>
-              <a:rPr sz="1062" b="0" i="0">
+          <a:bodyPr wrap="none" lIns="0" rIns="0" tIns="0" bIns="0" anchor="t">
+            <a:spAutoFit/>
+          </a:bodyPr>
+          <a:lstStyle/>
+          <a:p>
+            <a:r>
+              <a:rPr sz="935" b="0" i="0">
                 <a:solidFill>
                   <a:srgbClr val="EAF7F5"/>
                 </a:solidFill>
@@ -18720,7 +18720,7 @@
           </a:p>
           <a:p>
             <a:r>
-              <a:rPr sz="1062" b="0" i="0">
+              <a:rPr sz="935" b="0" i="0">
                 <a:solidFill>
                   <a:srgbClr val="EAF7F5"/>
                 </a:solidFill>
@@ -18731,7 +18731,7 @@
           </a:p>
           <a:p>
             <a:r>
-              <a:rPr sz="1062" b="0" i="0">
+              <a:rPr sz="935" b="0" i="0">
                 <a:solidFill>
                   <a:srgbClr val="EAF7F5"/>
                 </a:solidFill>
@@ -18742,7 +18742,7 @@
           </a:p>
           <a:p>
             <a:r>
-              <a:rPr sz="1062" b="0" i="0">
+              <a:rPr sz="935" b="0" i="0">
                 <a:solidFill>
                   <a:srgbClr val="EAF7F5"/>
                 </a:solidFill>
@@ -18753,7 +18753,7 @@
           </a:p>
           <a:p>
             <a:r>
-              <a:rPr sz="1062" b="0" i="0">
+              <a:rPr sz="935" b="0" i="0">
                 <a:solidFill>
                   <a:srgbClr val="EAF7F5"/>
                 </a:solidFill>
@@ -18764,7 +18764,7 @@
           </a:p>
           <a:p>
             <a:r>
-              <a:rPr sz="1062" b="0" i="0">
+              <a:rPr sz="935" b="0" i="0">
                 <a:solidFill>
                   <a:srgbClr val="EAF7F5"/>
                 </a:solidFill>
@@ -18775,7 +18775,7 @@
           </a:p>
           <a:p>
             <a:r>
-              <a:rPr sz="1062" b="0" i="0">
+              <a:rPr sz="935" b="0" i="0">
                 <a:solidFill>
                   <a:srgbClr val="EAF7F5"/>
                 </a:solidFill>
@@ -18786,7 +18786,7 @@
           </a:p>
           <a:p>
             <a:r>
-              <a:rPr sz="1062" b="0" i="0">
+              <a:rPr sz="935" b="0" i="0">
                 <a:solidFill>
                   <a:srgbClr val="EAF7F5"/>
                 </a:solidFill>
@@ -18797,7 +18797,7 @@
           </a:p>
           <a:p>
             <a:r>
-              <a:rPr sz="1062" b="0" i="0">
+              <a:rPr sz="935" b="0" i="0">
                 <a:solidFill>
                   <a:srgbClr val="EAF7F5"/>
                 </a:solidFill>
@@ -18808,7 +18808,7 @@
           </a:p>
           <a:p>
             <a:r>
-              <a:rPr sz="1062" b="0" i="0">
+              <a:rPr sz="935" b="0" i="0">
                 <a:solidFill>
                   <a:srgbClr val="EAF7F5"/>
                 </a:solidFill>
@@ -18819,7 +18819,7 @@
           </a:p>
           <a:p>
             <a:r>
-              <a:rPr sz="1062" b="0" i="0">
+              <a:rPr sz="935" b="0" i="0">
                 <a:solidFill>
                   <a:srgbClr val="EAF7F5"/>
                 </a:solidFill>
